--- a/docs/presentation/ITO_AX_Day_상담원AI코치.pptx
+++ b/docs/presentation/ITO_AX_Day_상담원AI코치.pptx
@@ -5494,7 +5494,7 @@
                 <a:ea typeface="맑은 고딕"/>
                 <a:cs typeface="맑은 고딕"/>
               </a:rPr>
-              <a:t>찾는 비율 (30문항 기준)</a:t>
+              <a:t>찾는 비율 (자체 30문항)</a:t>
             </a:r>
           </a:p>
         </p:txBody>
@@ -5674,7 +5674,7 @@
                 <a:ea typeface="Georgia"/>
                 <a:cs typeface="Georgia"/>
               </a:rPr>
-              <a:t>80%+</a:t>
+              <a:t>80%</a:t>
             </a:r>
           </a:p>
           <a:p>
@@ -5710,7 +5710,25 @@
                 <a:ea typeface="맑은 고딕"/>
                 <a:cs typeface="맑은 고딕"/>
               </a:rPr>
-              <a:t>답변 정확도 목표</a:t>
+              <a:t>답변 정확도</a:t>
+            </a:r>
+          </a:p>
+          <a:p>
+            <a:pPr algn="ctr">
+              <a:spcAft>
+                <a:spcPts val="300"/>
+              </a:spcAft>
+            </a:pPr>
+            <a:r>
+              <a:rPr sz="1300" b="0">
+                <a:solidFill>
+                  <a:srgbClr val="3B2C22"/>
+                </a:solidFill>
+                <a:latin typeface="맑은 고딕"/>
+                <a:ea typeface="맑은 고딕"/>
+                <a:cs typeface="맑은 고딕"/>
+              </a:rPr>
+              <a:t>(15문항 채점 결과)</a:t>
             </a:r>
           </a:p>
         </p:txBody>
@@ -5723,8 +5741,8 @@
         </p:nvSpPr>
         <p:spPr>
           <a:xfrm>
-            <a:off x="566928" y="4983480"/>
-            <a:ext cx="11064240" cy="457200"/>
+            <a:off x="566928" y="4937760"/>
+            <a:ext cx="11064240" cy="548640"/>
           </a:xfrm>
           <a:prstGeom prst="rect">
             <a:avLst/>
@@ -5743,7 +5761,7 @@
               </a:spcAft>
             </a:pPr>
             <a:r>
-              <a:rPr sz="1150" b="0">
+              <a:rPr sz="1100" b="0">
                 <a:solidFill>
                   <a:srgbClr val="8B7E70"/>
                 </a:solidFill>
@@ -5751,7 +5769,25 @@
                 <a:ea typeface="맑은 고딕"/>
                 <a:cs typeface="맑은 고딕"/>
               </a:rPr>
-              <a:t>신뢰도를 더 다지기 위해 평가 문항을 30 → 100문항으로 늘려 재측정 예정</a:t>
+              <a:t>측정 기준 — 검색: 자체 30문항(개선 효과는 16문항) · 답변: 15문항 의미 채점</a:t>
+            </a:r>
+          </a:p>
+          <a:p>
+            <a:pPr algn="ctr">
+              <a:spcAft>
+                <a:spcPts val="400"/>
+              </a:spcAft>
+            </a:pPr>
+            <a:r>
+              <a:rPr sz="1100" b="0">
+                <a:solidFill>
+                  <a:srgbClr val="8B7E70"/>
+                </a:solidFill>
+                <a:latin typeface="맑은 고딕"/>
+                <a:ea typeface="맑은 고딕"/>
+                <a:cs typeface="맑은 고딕"/>
+              </a:rPr>
+              <a:t>신뢰도를 더 다지기 위해 평가 문항을 100문항으로 늘려 재측정 예정</a:t>
             </a:r>
           </a:p>
         </p:txBody>
@@ -5812,7 +5848,7 @@
                 <a:ea typeface="맑은 고딕"/>
                 <a:cs typeface="맑은 고딕"/>
               </a:rPr>
-              <a:t>검색은 이미 최상위, 답변은 목표를 향해</a:t>
+              <a:t>검색은 이미 최상위, 답변도 실측으로 확인</a:t>
             </a:r>
           </a:p>
         </p:txBody>

--- a/docs/presentation/ITO_AX_Day_상담원AI코치.pptx
+++ b/docs/presentation/ITO_AX_Day_상담원AI코치.pptx
@@ -3809,7 +3809,8 @@
                 <a:ea typeface="맑은 고딕"/>
                 <a:cs typeface="맑은 고딕"/>
               </a:rPr>
-              <a:t>폐쇄망에서 바로 쓸 사내 생성 AI가 아직 없다</a:t>
+              <a:t>폐쇄망에서 바로 쓸
+사내 생성 AI가 아직 없다</a:t>
             </a:r>
           </a:p>
         </p:txBody>
@@ -3823,6 +3824,107 @@
         <p:spPr>
           <a:xfrm>
             <a:off x="4361688" y="1965960"/>
+            <a:ext cx="3474720" cy="3200400"/>
+          </a:xfrm>
+          <a:prstGeom prst="roundRect">
+            <a:avLst>
+              <a:gd name="adj" fmla="val 5000"/>
+            </a:avLst>
+          </a:prstGeom>
+          <a:solidFill>
+            <a:srgbClr val="FFFFFF"/>
+          </a:solidFill>
+          <a:ln w="22225">
+            <a:solidFill>
+              <a:srgbClr val="F37321"/>
+            </a:solidFill>
+          </a:ln>
+          <a:effectLst/>
+        </p:spPr>
+        <p:style>
+          <a:lnRef idx="1">
+            <a:schemeClr val="accent1"/>
+          </a:lnRef>
+          <a:fillRef idx="3">
+            <a:schemeClr val="accent1"/>
+          </a:fillRef>
+          <a:effectRef idx="2">
+            <a:schemeClr val="accent1"/>
+          </a:effectRef>
+          <a:fontRef idx="minor">
+            <a:schemeClr val="lt1"/>
+          </a:fontRef>
+        </p:style>
+        <p:txBody>
+          <a:bodyPr rtlCol="0" anchor="t" wrap="square" lIns="237744" rIns="237744" tIns="219456" bIns="219456"/>
+          <a:lstStyle/>
+          <a:p>
+            <a:pPr algn="l">
+              <a:spcAft>
+                <a:spcPts val="600"/>
+              </a:spcAft>
+            </a:pPr>
+            <a:r>
+              <a:rPr sz="1600" b="1">
+                <a:solidFill>
+                  <a:srgbClr val="C05A17"/>
+                </a:solidFill>
+                <a:latin typeface="맑은 고딕"/>
+                <a:ea typeface="맑은 고딕"/>
+                <a:cs typeface="맑은 고딕"/>
+              </a:rPr>
+              <a:t>해결</a:t>
+            </a:r>
+          </a:p>
+          <a:p>
+            <a:pPr algn="l">
+              <a:spcAft>
+                <a:spcPts val="600"/>
+              </a:spcAft>
+            </a:pPr>
+            <a:r>
+              <a:rPr sz="800" b="0">
+                <a:solidFill>
+                  <a:srgbClr val="3B2C22"/>
+                </a:solidFill>
+                <a:latin typeface="맑은 고딕"/>
+                <a:ea typeface="맑은 고딕"/>
+                <a:cs typeface="맑은 고딕"/>
+              </a:rPr>
+              <a:t/>
+            </a:r>
+          </a:p>
+          <a:p>
+            <a:pPr algn="l">
+              <a:spcAft>
+                <a:spcPts val="600"/>
+              </a:spcAft>
+            </a:pPr>
+            <a:r>
+              <a:rPr sz="1500" b="1">
+                <a:solidFill>
+                  <a:srgbClr val="3B2C22"/>
+                </a:solidFill>
+                <a:latin typeface="맑은 고딕"/>
+                <a:ea typeface="맑은 고딕"/>
+                <a:cs typeface="맑은 고딕"/>
+              </a:rPr>
+              <a:t>검색·기억은 이미 전부 사내에서 동작
+생성 AI만 갈아끼우기 쉽게 설계
+(외부는 생성 1곳만 임시)</a:t>
+            </a:r>
+          </a:p>
+        </p:txBody>
+      </p:sp>
+      <p:sp>
+        <p:nvSpPr>
+          <p:cNvPr id="10" name="Rounded Rectangle 9"/>
+          <p:cNvSpPr/>
+          <p:nvPr/>
+        </p:nvSpPr>
+        <p:spPr>
+          <a:xfrm>
+            <a:off x="8156448" y="1965960"/>
             <a:ext cx="3474720" cy="3200400"/>
           </a:xfrm>
           <a:prstGeom prst="roundRect">
@@ -3866,13 +3968,13 @@
             <a:r>
               <a:rPr sz="1600" b="1">
                 <a:solidFill>
-                  <a:srgbClr val="8B7E70"/>
-                </a:solidFill>
-                <a:latin typeface="맑은 고딕"/>
-                <a:ea typeface="맑은 고딕"/>
-                <a:cs typeface="맑은 고딕"/>
-              </a:rPr>
-              <a:t>임시 해결</a:t>
+                  <a:srgbClr val="C05A17"/>
+                </a:solidFill>
+                <a:latin typeface="맑은 고딕"/>
+                <a:ea typeface="맑은 고딕"/>
+                <a:cs typeface="맑은 고딕"/>
+              </a:rPr>
+              <a:t>실제 운영 적용 시</a:t>
             </a:r>
           </a:p>
           <a:p>
@@ -3902,115 +4004,15 @@
             <a:r>
               <a:rPr sz="1400" b="0">
                 <a:solidFill>
-                  <a:srgbClr val="8B7E70"/>
-                </a:solidFill>
-                <a:latin typeface="맑은 고딕"/>
-                <a:ea typeface="맑은 고딕"/>
-                <a:cs typeface="맑은 고딕"/>
-              </a:rPr>
-              <a:t>외부 생성 AI를 임시로 사용
-(※ 검색·기억은 이미 전부 사내에서 동작)</a:t>
-            </a:r>
-          </a:p>
-        </p:txBody>
-      </p:sp>
-      <p:sp>
-        <p:nvSpPr>
-          <p:cNvPr id="10" name="Rounded Rectangle 9"/>
-          <p:cNvSpPr/>
-          <p:nvPr/>
-        </p:nvSpPr>
-        <p:spPr>
-          <a:xfrm>
-            <a:off x="8156448" y="1965960"/>
-            <a:ext cx="3474720" cy="3200400"/>
-          </a:xfrm>
-          <a:prstGeom prst="roundRect">
-            <a:avLst>
-              <a:gd name="adj" fmla="val 5000"/>
-            </a:avLst>
-          </a:prstGeom>
-          <a:solidFill>
-            <a:srgbClr val="FFFFFF"/>
-          </a:solidFill>
-          <a:ln w="22225">
-            <a:solidFill>
-              <a:srgbClr val="F37321"/>
-            </a:solidFill>
-          </a:ln>
-          <a:effectLst/>
-        </p:spPr>
-        <p:style>
-          <a:lnRef idx="1">
-            <a:schemeClr val="accent1"/>
-          </a:lnRef>
-          <a:fillRef idx="3">
-            <a:schemeClr val="accent1"/>
-          </a:fillRef>
-          <a:effectRef idx="2">
-            <a:schemeClr val="accent1"/>
-          </a:effectRef>
-          <a:fontRef idx="minor">
-            <a:schemeClr val="lt1"/>
-          </a:fontRef>
-        </p:style>
-        <p:txBody>
-          <a:bodyPr rtlCol="0" anchor="t" wrap="square" lIns="237744" rIns="237744" tIns="219456" bIns="219456"/>
-          <a:lstStyle/>
-          <a:p>
-            <a:pPr algn="l">
-              <a:spcAft>
-                <a:spcPts val="600"/>
-              </a:spcAft>
-            </a:pPr>
-            <a:r>
-              <a:rPr sz="1600" b="1">
-                <a:solidFill>
-                  <a:srgbClr val="C05A17"/>
-                </a:solidFill>
-                <a:latin typeface="맑은 고딕"/>
-                <a:ea typeface="맑은 고딕"/>
-                <a:cs typeface="맑은 고딕"/>
-              </a:rPr>
-              <a:t>근본 해결</a:t>
-            </a:r>
-          </a:p>
-          <a:p>
-            <a:pPr algn="l">
-              <a:spcAft>
-                <a:spcPts val="600"/>
-              </a:spcAft>
-            </a:pPr>
-            <a:r>
-              <a:rPr sz="800" b="0">
-                <a:solidFill>
                   <a:srgbClr val="3B2C22"/>
                 </a:solidFill>
                 <a:latin typeface="맑은 고딕"/>
                 <a:ea typeface="맑은 고딕"/>
                 <a:cs typeface="맑은 고딕"/>
               </a:rPr>
-              <a:t/>
-            </a:r>
-          </a:p>
-          <a:p>
-            <a:pPr algn="l">
-              <a:spcAft>
-                <a:spcPts val="600"/>
-              </a:spcAft>
-            </a:pPr>
-            <a:r>
-              <a:rPr sz="1500" b="1">
-                <a:solidFill>
-                  <a:srgbClr val="3B2C22"/>
-                </a:solidFill>
-                <a:latin typeface="맑은 고딕"/>
-                <a:ea typeface="맑은 고딕"/>
-                <a:cs typeface="맑은 고딕"/>
-              </a:rPr>
-              <a:t>갈아끼우기 쉬운 구조로 설계 —
-사내망 모델이 준비되면
-코드 수정 없이 즉시 교체</a:t>
+              <a:t>사내망 모델을 붙여
+코드 변경 없이 즉시 교체 → 완전 사내화
+필요: 사내 GPU 서버 · 사내 LLM</a:t>
             </a:r>
           </a:p>
         </p:txBody>
@@ -4071,7 +4073,7 @@
                 <a:ea typeface="맑은 고딕"/>
                 <a:cs typeface="맑은 고딕"/>
               </a:rPr>
-              <a:t>임시로 굴리되, 언제든 사내로 갈아끼운다</a:t>
+              <a:t>핵심은 이미 사내에서 돈다 — 생성만 갈아끼우면 완전 사내화</a:t>
             </a:r>
           </a:p>
         </p:txBody>
@@ -13283,7 +13285,8 @@
                 <a:ea typeface="맑은 고딕"/>
                 <a:cs typeface="맑은 고딕"/>
               </a:rPr>
-              <a:t>사내 편람을 밖으로 내보낼 수 없다</a:t>
+              <a:t>사내 편람을 밖으로
+내보낼 수 없다</a:t>
             </a:r>
           </a:p>
         </p:txBody>
@@ -13297,6 +13300,107 @@
         <p:spPr>
           <a:xfrm>
             <a:off x="4361688" y="1965960"/>
+            <a:ext cx="3474720" cy="3200400"/>
+          </a:xfrm>
+          <a:prstGeom prst="roundRect">
+            <a:avLst>
+              <a:gd name="adj" fmla="val 5000"/>
+            </a:avLst>
+          </a:prstGeom>
+          <a:solidFill>
+            <a:srgbClr val="FFFFFF"/>
+          </a:solidFill>
+          <a:ln w="22225">
+            <a:solidFill>
+              <a:srgbClr val="F37321"/>
+            </a:solidFill>
+          </a:ln>
+          <a:effectLst/>
+        </p:spPr>
+        <p:style>
+          <a:lnRef idx="1">
+            <a:schemeClr val="accent1"/>
+          </a:lnRef>
+          <a:fillRef idx="3">
+            <a:schemeClr val="accent1"/>
+          </a:fillRef>
+          <a:effectRef idx="2">
+            <a:schemeClr val="accent1"/>
+          </a:effectRef>
+          <a:fontRef idx="minor">
+            <a:schemeClr val="lt1"/>
+          </a:fontRef>
+        </p:style>
+        <p:txBody>
+          <a:bodyPr rtlCol="0" anchor="t" wrap="square" lIns="237744" rIns="237744" tIns="219456" bIns="219456"/>
+          <a:lstStyle/>
+          <a:p>
+            <a:pPr algn="l">
+              <a:spcAft>
+                <a:spcPts val="600"/>
+              </a:spcAft>
+            </a:pPr>
+            <a:r>
+              <a:rPr sz="1600" b="1">
+                <a:solidFill>
+                  <a:srgbClr val="C05A17"/>
+                </a:solidFill>
+                <a:latin typeface="맑은 고딕"/>
+                <a:ea typeface="맑은 고딕"/>
+                <a:cs typeface="맑은 고딕"/>
+              </a:rPr>
+              <a:t>해결</a:t>
+            </a:r>
+          </a:p>
+          <a:p>
+            <a:pPr algn="l">
+              <a:spcAft>
+                <a:spcPts val="600"/>
+              </a:spcAft>
+            </a:pPr>
+            <a:r>
+              <a:rPr sz="800" b="0">
+                <a:solidFill>
+                  <a:srgbClr val="3B2C22"/>
+                </a:solidFill>
+                <a:latin typeface="맑은 고딕"/>
+                <a:ea typeface="맑은 고딕"/>
+                <a:cs typeface="맑은 고딕"/>
+              </a:rPr>
+              <a:t/>
+            </a:r>
+          </a:p>
+          <a:p>
+            <a:pPr algn="l">
+              <a:spcAft>
+                <a:spcPts val="600"/>
+              </a:spcAft>
+            </a:pPr>
+            <a:r>
+              <a:rPr sz="1500" b="1">
+                <a:solidFill>
+                  <a:srgbClr val="3B2C22"/>
+                </a:solidFill>
+                <a:latin typeface="맑은 고딕"/>
+                <a:ea typeface="맑은 고딕"/>
+                <a:cs typeface="맑은 고딕"/>
+              </a:rPr>
+              <a:t>사내 인증으로 위키·편람을
+폐쇄망 안에서 직접 수집
+(PDF·HTML 반입도 지원)</a:t>
+            </a:r>
+          </a:p>
+        </p:txBody>
+      </p:sp>
+      <p:sp>
+        <p:nvSpPr>
+          <p:cNvPr id="10" name="Rounded Rectangle 9"/>
+          <p:cNvSpPr/>
+          <p:nvPr/>
+        </p:nvSpPr>
+        <p:spPr>
+          <a:xfrm>
+            <a:off x="8156448" y="1965960"/>
             <a:ext cx="3474720" cy="3200400"/>
           </a:xfrm>
           <a:prstGeom prst="roundRect">
@@ -13340,13 +13444,13 @@
             <a:r>
               <a:rPr sz="1600" b="1">
                 <a:solidFill>
-                  <a:srgbClr val="8B7E70"/>
-                </a:solidFill>
-                <a:latin typeface="맑은 고딕"/>
-                <a:ea typeface="맑은 고딕"/>
-                <a:cs typeface="맑은 고딕"/>
-              </a:rPr>
-              <a:t>임시 해결</a:t>
+                  <a:srgbClr val="C05A17"/>
+                </a:solidFill>
+                <a:latin typeface="맑은 고딕"/>
+                <a:ea typeface="맑은 고딕"/>
+                <a:cs typeface="맑은 고딕"/>
+              </a:rPr>
+              <a:t>실제 운영 적용 시</a:t>
             </a:r>
           </a:p>
           <a:p>
@@ -13376,112 +13480,15 @@
             <a:r>
               <a:rPr sz="1400" b="0">
                 <a:solidFill>
-                  <a:srgbClr val="8B7E70"/>
-                </a:solidFill>
-                <a:latin typeface="맑은 고딕"/>
-                <a:ea typeface="맑은 고딕"/>
-                <a:cs typeface="맑은 고딕"/>
-              </a:rPr>
-              <a:t>PDF·HTML을 사람이 직접 반입해 넣었다</a:t>
-            </a:r>
-          </a:p>
-        </p:txBody>
-      </p:sp>
-      <p:sp>
-        <p:nvSpPr>
-          <p:cNvPr id="10" name="Rounded Rectangle 9"/>
-          <p:cNvSpPr/>
-          <p:nvPr/>
-        </p:nvSpPr>
-        <p:spPr>
-          <a:xfrm>
-            <a:off x="8156448" y="1965960"/>
-            <a:ext cx="3474720" cy="3200400"/>
-          </a:xfrm>
-          <a:prstGeom prst="roundRect">
-            <a:avLst>
-              <a:gd name="adj" fmla="val 5000"/>
-            </a:avLst>
-          </a:prstGeom>
-          <a:solidFill>
-            <a:srgbClr val="FFFFFF"/>
-          </a:solidFill>
-          <a:ln w="22225">
-            <a:solidFill>
-              <a:srgbClr val="F37321"/>
-            </a:solidFill>
-          </a:ln>
-          <a:effectLst/>
-        </p:spPr>
-        <p:style>
-          <a:lnRef idx="1">
-            <a:schemeClr val="accent1"/>
-          </a:lnRef>
-          <a:fillRef idx="3">
-            <a:schemeClr val="accent1"/>
-          </a:fillRef>
-          <a:effectRef idx="2">
-            <a:schemeClr val="accent1"/>
-          </a:effectRef>
-          <a:fontRef idx="minor">
-            <a:schemeClr val="lt1"/>
-          </a:fontRef>
-        </p:style>
-        <p:txBody>
-          <a:bodyPr rtlCol="0" anchor="t" wrap="square" lIns="237744" rIns="237744" tIns="219456" bIns="219456"/>
-          <a:lstStyle/>
-          <a:p>
-            <a:pPr algn="l">
-              <a:spcAft>
-                <a:spcPts val="600"/>
-              </a:spcAft>
-            </a:pPr>
-            <a:r>
-              <a:rPr sz="1600" b="1">
-                <a:solidFill>
-                  <a:srgbClr val="C05A17"/>
-                </a:solidFill>
-                <a:latin typeface="맑은 고딕"/>
-                <a:ea typeface="맑은 고딕"/>
-                <a:cs typeface="맑은 고딕"/>
-              </a:rPr>
-              <a:t>근본 해결</a:t>
-            </a:r>
-          </a:p>
-          <a:p>
-            <a:pPr algn="l">
-              <a:spcAft>
-                <a:spcPts val="600"/>
-              </a:spcAft>
-            </a:pPr>
-            <a:r>
-              <a:rPr sz="800" b="0">
-                <a:solidFill>
                   <a:srgbClr val="3B2C22"/>
                 </a:solidFill>
                 <a:latin typeface="맑은 고딕"/>
                 <a:ea typeface="맑은 고딕"/>
                 <a:cs typeface="맑은 고딕"/>
               </a:rPr>
-              <a:t/>
-            </a:r>
-          </a:p>
-          <a:p>
-            <a:pPr algn="l">
-              <a:spcAft>
-                <a:spcPts val="600"/>
-              </a:spcAft>
-            </a:pPr>
-            <a:r>
-              <a:rPr sz="1500" b="1">
-                <a:solidFill>
-                  <a:srgbClr val="3B2C22"/>
-                </a:solidFill>
-                <a:latin typeface="맑은 고딕"/>
-                <a:ea typeface="맑은 고딕"/>
-                <a:cs typeface="맑은 고딕"/>
-              </a:rPr>
-              <a:t>서버 도입 시 위키에 직접 연결해 자동으로 받아온다</a:t>
+              <a:t>서버를 두고 위키에 상시 연동해
+자동으로 최신화
+필요: 사내 서버 · 위키 접근 권한</a:t>
             </a:r>
           </a:p>
         </p:txBody>
@@ -13542,7 +13549,7 @@
                 <a:ea typeface="맑은 고딕"/>
                 <a:cs typeface="맑은 고딕"/>
               </a:rPr>
-              <a:t>지금도 되고, 서버 붙으면 자동이 된다</a:t>
+              <a:t>지금도 수집되고, 서버가 붙으면 자동 연동된다</a:t>
             </a:r>
           </a:p>
         </p:txBody>
@@ -13911,7 +13918,8 @@
                 <a:ea typeface="맑은 고딕"/>
                 <a:cs typeface="맑은 고딕"/>
               </a:rPr>
-              <a:t>편람이 조금만 바뀌어도 전체를 다시 처리하면 느리고 비싸다</a:t>
+              <a:t>조금만 바뀌어도 전체를
+다시 처리하면 느리고 비싸다</a:t>
             </a:r>
           </a:p>
         </p:txBody>
@@ -13925,6 +13933,107 @@
         <p:spPr>
           <a:xfrm>
             <a:off x="4361688" y="1965960"/>
+            <a:ext cx="3474720" cy="3200400"/>
+          </a:xfrm>
+          <a:prstGeom prst="roundRect">
+            <a:avLst>
+              <a:gd name="adj" fmla="val 5000"/>
+            </a:avLst>
+          </a:prstGeom>
+          <a:solidFill>
+            <a:srgbClr val="FFFFFF"/>
+          </a:solidFill>
+          <a:ln w="22225">
+            <a:solidFill>
+              <a:srgbClr val="F37321"/>
+            </a:solidFill>
+          </a:ln>
+          <a:effectLst/>
+        </p:spPr>
+        <p:style>
+          <a:lnRef idx="1">
+            <a:schemeClr val="accent1"/>
+          </a:lnRef>
+          <a:fillRef idx="3">
+            <a:schemeClr val="accent1"/>
+          </a:fillRef>
+          <a:effectRef idx="2">
+            <a:schemeClr val="accent1"/>
+          </a:effectRef>
+          <a:fontRef idx="minor">
+            <a:schemeClr val="lt1"/>
+          </a:fontRef>
+        </p:style>
+        <p:txBody>
+          <a:bodyPr rtlCol="0" anchor="t" wrap="square" lIns="237744" rIns="237744" tIns="219456" bIns="219456"/>
+          <a:lstStyle/>
+          <a:p>
+            <a:pPr algn="l">
+              <a:spcAft>
+                <a:spcPts val="600"/>
+              </a:spcAft>
+            </a:pPr>
+            <a:r>
+              <a:rPr sz="1600" b="1">
+                <a:solidFill>
+                  <a:srgbClr val="C05A17"/>
+                </a:solidFill>
+                <a:latin typeface="맑은 고딕"/>
+                <a:ea typeface="맑은 고딕"/>
+                <a:cs typeface="맑은 고딕"/>
+              </a:rPr>
+              <a:t>해결</a:t>
+            </a:r>
+          </a:p>
+          <a:p>
+            <a:pPr algn="l">
+              <a:spcAft>
+                <a:spcPts val="600"/>
+              </a:spcAft>
+            </a:pPr>
+            <a:r>
+              <a:rPr sz="800" b="0">
+                <a:solidFill>
+                  <a:srgbClr val="3B2C22"/>
+                </a:solidFill>
+                <a:latin typeface="맑은 고딕"/>
+                <a:ea typeface="맑은 고딕"/>
+                <a:cs typeface="맑은 고딕"/>
+              </a:rPr>
+              <a:t/>
+            </a:r>
+          </a:p>
+          <a:p>
+            <a:pPr algn="l">
+              <a:spcAft>
+                <a:spcPts val="600"/>
+              </a:spcAft>
+            </a:pPr>
+            <a:r>
+              <a:rPr sz="1500" b="1">
+                <a:solidFill>
+                  <a:srgbClr val="3B2C22"/>
+                </a:solidFill>
+                <a:latin typeface="맑은 고딕"/>
+                <a:ea typeface="맑은 고딕"/>
+                <a:cs typeface="맑은 고딕"/>
+              </a:rPr>
+              <a:t>내용 지문을 비교해
+바뀐 조각만 갱신하도록 구현
+변경 1~5%면 재작업 대부분 제거</a:t>
+            </a:r>
+          </a:p>
+        </p:txBody>
+      </p:sp>
+      <p:sp>
+        <p:nvSpPr>
+          <p:cNvPr id="10" name="Rounded Rectangle 9"/>
+          <p:cNvSpPr/>
+          <p:nvPr/>
+        </p:nvSpPr>
+        <p:spPr>
+          <a:xfrm>
+            <a:off x="8156448" y="1965960"/>
             <a:ext cx="3474720" cy="3200400"/>
           </a:xfrm>
           <a:prstGeom prst="roundRect">
@@ -13968,13 +14077,13 @@
             <a:r>
               <a:rPr sz="1600" b="1">
                 <a:solidFill>
-                  <a:srgbClr val="8B7E70"/>
-                </a:solidFill>
-                <a:latin typeface="맑은 고딕"/>
-                <a:ea typeface="맑은 고딕"/>
-                <a:cs typeface="맑은 고딕"/>
-              </a:rPr>
-              <a:t>임시 해결</a:t>
+                  <a:srgbClr val="C05A17"/>
+                </a:solidFill>
+                <a:latin typeface="맑은 고딕"/>
+                <a:ea typeface="맑은 고딕"/>
+                <a:cs typeface="맑은 고딕"/>
+              </a:rPr>
+              <a:t>실제 운영 적용 시</a:t>
             </a:r>
           </a:p>
           <a:p>
@@ -14004,112 +14113,15 @@
             <a:r>
               <a:rPr sz="1400" b="0">
                 <a:solidFill>
-                  <a:srgbClr val="8B7E70"/>
-                </a:solidFill>
-                <a:latin typeface="맑은 고딕"/>
-                <a:ea typeface="맑은 고딕"/>
-                <a:cs typeface="맑은 고딕"/>
-              </a:rPr>
-              <a:t>그냥 전량 재처리</a:t>
-            </a:r>
-          </a:p>
-        </p:txBody>
-      </p:sp>
-      <p:sp>
-        <p:nvSpPr>
-          <p:cNvPr id="10" name="Rounded Rectangle 9"/>
-          <p:cNvSpPr/>
-          <p:nvPr/>
-        </p:nvSpPr>
-        <p:spPr>
-          <a:xfrm>
-            <a:off x="8156448" y="1965960"/>
-            <a:ext cx="3474720" cy="3200400"/>
-          </a:xfrm>
-          <a:prstGeom prst="roundRect">
-            <a:avLst>
-              <a:gd name="adj" fmla="val 5000"/>
-            </a:avLst>
-          </a:prstGeom>
-          <a:solidFill>
-            <a:srgbClr val="FFFFFF"/>
-          </a:solidFill>
-          <a:ln w="22225">
-            <a:solidFill>
-              <a:srgbClr val="F37321"/>
-            </a:solidFill>
-          </a:ln>
-          <a:effectLst/>
-        </p:spPr>
-        <p:style>
-          <a:lnRef idx="1">
-            <a:schemeClr val="accent1"/>
-          </a:lnRef>
-          <a:fillRef idx="3">
-            <a:schemeClr val="accent1"/>
-          </a:fillRef>
-          <a:effectRef idx="2">
-            <a:schemeClr val="accent1"/>
-          </a:effectRef>
-          <a:fontRef idx="minor">
-            <a:schemeClr val="lt1"/>
-          </a:fontRef>
-        </p:style>
-        <p:txBody>
-          <a:bodyPr rtlCol="0" anchor="t" wrap="square" lIns="237744" rIns="237744" tIns="219456" bIns="219456"/>
-          <a:lstStyle/>
-          <a:p>
-            <a:pPr algn="l">
-              <a:spcAft>
-                <a:spcPts val="600"/>
-              </a:spcAft>
-            </a:pPr>
-            <a:r>
-              <a:rPr sz="1600" b="1">
-                <a:solidFill>
-                  <a:srgbClr val="C05A17"/>
-                </a:solidFill>
-                <a:latin typeface="맑은 고딕"/>
-                <a:ea typeface="맑은 고딕"/>
-                <a:cs typeface="맑은 고딕"/>
-              </a:rPr>
-              <a:t>근본 해결</a:t>
-            </a:r>
-          </a:p>
-          <a:p>
-            <a:pPr algn="l">
-              <a:spcAft>
-                <a:spcPts val="600"/>
-              </a:spcAft>
-            </a:pPr>
-            <a:r>
-              <a:rPr sz="800" b="0">
-                <a:solidFill>
                   <a:srgbClr val="3B2C22"/>
                 </a:solidFill>
                 <a:latin typeface="맑은 고딕"/>
                 <a:ea typeface="맑은 고딕"/>
                 <a:cs typeface="맑은 고딕"/>
               </a:rPr>
-              <a:t/>
-            </a:r>
-          </a:p>
-          <a:p>
-            <a:pPr algn="l">
-              <a:spcAft>
-                <a:spcPts val="600"/>
-              </a:spcAft>
-            </a:pPr>
-            <a:r>
-              <a:rPr sz="1500" b="1">
-                <a:solidFill>
-                  <a:srgbClr val="3B2C22"/>
-                </a:solidFill>
-                <a:latin typeface="맑은 고딕"/>
-                <a:ea typeface="맑은 고딕"/>
-                <a:cs typeface="맑은 고딕"/>
-              </a:rPr>
-              <a:t>내용 지문(고유값)을 비교해 바뀐 조각만 갱신</a:t>
+              <a:t>위키 변경에 맞춰
+정기 자동 동기화
+필요: 배치 스케줄러 운영</a:t>
             </a:r>
           </a:p>
         </p:txBody>
@@ -14170,7 +14182,7 @@
                 <a:ea typeface="맑은 고딕"/>
                 <a:cs typeface="맑은 고딕"/>
               </a:rPr>
-              <a:t>바뀐 1~5%만 손대 재작업 대부분을 없앴다</a:t>
+              <a:t>바뀐 1~5%만 손대 재작업을 없앴다 — 실제로 구현한 방식</a:t>
             </a:r>
           </a:p>
         </p:txBody>
@@ -14539,7 +14551,8 @@
                 <a:ea typeface="맑은 고딕"/>
                 <a:cs typeface="맑은 고딕"/>
               </a:rPr>
-              <a:t>단순 검색은 엉뚱한 근거로 그럴듯하게 틀린다</a:t>
+              <a:t>단순 검색은 엉뚱한 근거로
+그럴듯하게 틀린다</a:t>
             </a:r>
           </a:p>
         </p:txBody>
@@ -14553,6 +14566,107 @@
         <p:spPr>
           <a:xfrm>
             <a:off x="4361688" y="1965960"/>
+            <a:ext cx="3474720" cy="3200400"/>
+          </a:xfrm>
+          <a:prstGeom prst="roundRect">
+            <a:avLst>
+              <a:gd name="adj" fmla="val 5000"/>
+            </a:avLst>
+          </a:prstGeom>
+          <a:solidFill>
+            <a:srgbClr val="FFFFFF"/>
+          </a:solidFill>
+          <a:ln w="22225">
+            <a:solidFill>
+              <a:srgbClr val="F37321"/>
+            </a:solidFill>
+          </a:ln>
+          <a:effectLst/>
+        </p:spPr>
+        <p:style>
+          <a:lnRef idx="1">
+            <a:schemeClr val="accent1"/>
+          </a:lnRef>
+          <a:fillRef idx="3">
+            <a:schemeClr val="accent1"/>
+          </a:fillRef>
+          <a:effectRef idx="2">
+            <a:schemeClr val="accent1"/>
+          </a:effectRef>
+          <a:fontRef idx="minor">
+            <a:schemeClr val="lt1"/>
+          </a:fontRef>
+        </p:style>
+        <p:txBody>
+          <a:bodyPr rtlCol="0" anchor="t" wrap="square" lIns="237744" rIns="237744" tIns="219456" bIns="219456"/>
+          <a:lstStyle/>
+          <a:p>
+            <a:pPr algn="l">
+              <a:spcAft>
+                <a:spcPts val="600"/>
+              </a:spcAft>
+            </a:pPr>
+            <a:r>
+              <a:rPr sz="1600" b="1">
+                <a:solidFill>
+                  <a:srgbClr val="C05A17"/>
+                </a:solidFill>
+                <a:latin typeface="맑은 고딕"/>
+                <a:ea typeface="맑은 고딕"/>
+                <a:cs typeface="맑은 고딕"/>
+              </a:rPr>
+              <a:t>해결</a:t>
+            </a:r>
+          </a:p>
+          <a:p>
+            <a:pPr algn="l">
+              <a:spcAft>
+                <a:spcPts val="600"/>
+              </a:spcAft>
+            </a:pPr>
+            <a:r>
+              <a:rPr sz="800" b="0">
+                <a:solidFill>
+                  <a:srgbClr val="3B2C22"/>
+                </a:solidFill>
+                <a:latin typeface="맑은 고딕"/>
+                <a:ea typeface="맑은 고딕"/>
+                <a:cs typeface="맑은 고딕"/>
+              </a:rPr>
+              <a:t/>
+            </a:r>
+          </a:p>
+          <a:p>
+            <a:pPr algn="l">
+              <a:spcAft>
+                <a:spcPts val="600"/>
+              </a:spcAft>
+            </a:pPr>
+            <a:r>
+              <a:rPr sz="1500" b="1">
+                <a:solidFill>
+                  <a:srgbClr val="3B2C22"/>
+                </a:solidFill>
+                <a:latin typeface="맑은 고딕"/>
+                <a:ea typeface="맑은 고딕"/>
+                <a:cs typeface="맑은 고딕"/>
+              </a:rPr>
+              <a:t>뜻+단어 함께 찾기 · 조각 크기 조정 ·
+출처 표시를 구현
+최상위 적중률 62% → 81%</a:t>
+            </a:r>
+          </a:p>
+        </p:txBody>
+      </p:sp>
+      <p:sp>
+        <p:nvSpPr>
+          <p:cNvPr id="10" name="Rounded Rectangle 9"/>
+          <p:cNvSpPr/>
+          <p:nvPr/>
+        </p:nvSpPr>
+        <p:spPr>
+          <a:xfrm>
+            <a:off x="8156448" y="1965960"/>
             <a:ext cx="3474720" cy="3200400"/>
           </a:xfrm>
           <a:prstGeom prst="roundRect">
@@ -14596,13 +14710,13 @@
             <a:r>
               <a:rPr sz="1600" b="1">
                 <a:solidFill>
-                  <a:srgbClr val="8B7E70"/>
-                </a:solidFill>
-                <a:latin typeface="맑은 고딕"/>
-                <a:ea typeface="맑은 고딕"/>
-                <a:cs typeface="맑은 고딕"/>
-              </a:rPr>
-              <a:t>임시 해결</a:t>
+                  <a:srgbClr val="C05A17"/>
+                </a:solidFill>
+                <a:latin typeface="맑은 고딕"/>
+                <a:ea typeface="맑은 고딕"/>
+                <a:cs typeface="맑은 고딕"/>
+              </a:rPr>
+              <a:t>실제 운영 적용 시</a:t>
             </a:r>
           </a:p>
           <a:p>
@@ -14632,112 +14746,15 @@
             <a:r>
               <a:rPr sz="1400" b="0">
                 <a:solidFill>
-                  <a:srgbClr val="8B7E70"/>
-                </a:solidFill>
-                <a:latin typeface="맑은 고딕"/>
-                <a:ea typeface="맑은 고딕"/>
-                <a:cs typeface="맑은 고딕"/>
-              </a:rPr>
-              <a:t>비슷한 문서 하나 찾아 답변</a:t>
-            </a:r>
-          </a:p>
-        </p:txBody>
-      </p:sp>
-      <p:sp>
-        <p:nvSpPr>
-          <p:cNvPr id="10" name="Rounded Rectangle 9"/>
-          <p:cNvSpPr/>
-          <p:nvPr/>
-        </p:nvSpPr>
-        <p:spPr>
-          <a:xfrm>
-            <a:off x="8156448" y="1965960"/>
-            <a:ext cx="3474720" cy="3200400"/>
-          </a:xfrm>
-          <a:prstGeom prst="roundRect">
-            <a:avLst>
-              <a:gd name="adj" fmla="val 5000"/>
-            </a:avLst>
-          </a:prstGeom>
-          <a:solidFill>
-            <a:srgbClr val="FFFFFF"/>
-          </a:solidFill>
-          <a:ln w="22225">
-            <a:solidFill>
-              <a:srgbClr val="F37321"/>
-            </a:solidFill>
-          </a:ln>
-          <a:effectLst/>
-        </p:spPr>
-        <p:style>
-          <a:lnRef idx="1">
-            <a:schemeClr val="accent1"/>
-          </a:lnRef>
-          <a:fillRef idx="3">
-            <a:schemeClr val="accent1"/>
-          </a:fillRef>
-          <a:effectRef idx="2">
-            <a:schemeClr val="accent1"/>
-          </a:effectRef>
-          <a:fontRef idx="minor">
-            <a:schemeClr val="lt1"/>
-          </a:fontRef>
-        </p:style>
-        <p:txBody>
-          <a:bodyPr rtlCol="0" anchor="t" wrap="square" lIns="237744" rIns="237744" tIns="219456" bIns="219456"/>
-          <a:lstStyle/>
-          <a:p>
-            <a:pPr algn="l">
-              <a:spcAft>
-                <a:spcPts val="600"/>
-              </a:spcAft>
-            </a:pPr>
-            <a:r>
-              <a:rPr sz="1600" b="1">
-                <a:solidFill>
-                  <a:srgbClr val="C05A17"/>
-                </a:solidFill>
-                <a:latin typeface="맑은 고딕"/>
-                <a:ea typeface="맑은 고딕"/>
-                <a:cs typeface="맑은 고딕"/>
-              </a:rPr>
-              <a:t>근본 해결</a:t>
-            </a:r>
-          </a:p>
-          <a:p>
-            <a:pPr algn="l">
-              <a:spcAft>
-                <a:spcPts val="600"/>
-              </a:spcAft>
-            </a:pPr>
-            <a:r>
-              <a:rPr sz="800" b="0">
-                <a:solidFill>
                   <a:srgbClr val="3B2C22"/>
                 </a:solidFill>
                 <a:latin typeface="맑은 고딕"/>
                 <a:ea typeface="맑은 고딕"/>
                 <a:cs typeface="맑은 고딕"/>
               </a:rPr>
-              <a:t/>
-            </a:r>
-          </a:p>
-          <a:p>
-            <a:pPr algn="l">
-              <a:spcAft>
-                <a:spcPts val="600"/>
-              </a:spcAft>
-            </a:pPr>
-            <a:r>
-              <a:rPr sz="1500" b="1">
-                <a:solidFill>
-                  <a:srgbClr val="3B2C22"/>
-                </a:solidFill>
-                <a:latin typeface="맑은 고딕"/>
-                <a:ea typeface="맑은 고딕"/>
-                <a:cs typeface="맑은 고딕"/>
-              </a:rPr>
-              <a:t>뜻+단어를 함께 찾고 · 조각 크기를 조정하고 · 출처를 붙여 보여준다</a:t>
+              <a:t>전체 편람으로 평가 문항 확대 재측정 +
+확신 낮은 답은 상담원 검토
+필요: 정기 평가 체계</a:t>
             </a:r>
           </a:p>
         </p:txBody>
@@ -14798,7 +14815,7 @@
                 <a:ea typeface="맑은 고딕"/>
                 <a:cs typeface="맑은 고딕"/>
               </a:rPr>
-              <a:t>정확도가 눈에 띄게 올랐다 (다음 장 수치)</a:t>
+              <a:t>정확도를 실제로 끌어올렸다 (다음 장 수치)</a:t>
             </a:r>
           </a:p>
         </p:txBody>
